--- a/builders-day/Parmana-Razorpay-Builders-Day.pptx
+++ b/builders-day/Parmana-Razorpay-Builders-Day.pptx
@@ -10128,7 +10128,7 @@
                           <a:ea typeface="Calibri" pitchFamily="34" charset="-122"/>
                           <a:cs typeface="Calibri" pitchFamily="34" charset="-120"/>
                         </a:rPr>
-                        <a:t>Refused: approval already used</a:t>
+                        <a:t>Refused: approval spent, no longer matches</a:t>
                       </a:r>
                       <a:endParaRPr lang="en-US" sz="1500" dirty="0">
                         <a:latin typeface="Calibri" charset="0"/>
